--- a/examples/sample-outputs/iris-deck.pptx
+++ b/examples/sample-outputs/iris-deck.pptx
@@ -3188,7 +3188,7 @@
               <a:defRPr sz="1800"/>
             </a:pPr>
             <a:r>
-              <a:t>Goal: predict species from 4 measurements</a:t>
+              <a:t>Predict species from 4 measurements</a:t>
             </a:r>
           </a:p>
           <a:p>
@@ -3235,43 +3235,165 @@
           <a:lstStyle/>
           <a:p>
             <a:r>
-              <a:t>Method</a:t>
-            </a:r>
-          </a:p>
-        </p:txBody>
-      </p:sp>
-      <p:sp>
-        <p:nvSpPr>
-          <p:cNvPr id="3" name="Content Placeholder 2"/>
-          <p:cNvSpPr>
-            <a:spLocks noGrp="1"/>
-          </p:cNvSpPr>
-          <p:nvPr>
-            <p:ph idx="1"/>
-          </p:nvPr>
-        </p:nvSpPr>
-        <p:spPr/>
-        <p:txBody>
-          <a:bodyPr/>
-          <a:lstStyle/>
-          <a:p>
-            <a:pPr>
-              <a:defRPr sz="1800"/>
-            </a:pPr>
-            <a:r>
-              <a:t>Leakage-safe pipeline: StandardScaler -&gt; LogisticRegression</a:t>
-            </a:r>
-          </a:p>
-          <a:p>
-            <a:pPr>
-              <a:defRPr sz="1800"/>
-            </a:pPr>
-            <a:r>
-              <a:t>Stratified 70/30 split, seed 42</a:t>
-            </a:r>
-          </a:p>
-        </p:txBody>
-      </p:sp>
+              <a:t>Results</a:t>
+            </a:r>
+          </a:p>
+        </p:txBody>
+      </p:sp>
+      <p:graphicFrame>
+        <p:nvGraphicFramePr>
+          <p:cNvPr id="3" name="Table 2"/>
+          <p:cNvGraphicFramePr>
+            <a:graphicFrameLocks noGrp="1"/>
+          </p:cNvGraphicFramePr>
+          <p:nvPr/>
+        </p:nvGraphicFramePr>
+        <p:xfrm>
+          <a:off x="640080" y="1554480"/>
+          <a:ext cx="7863840" cy="1463040"/>
+        </p:xfrm>
+        <a:graphic>
+          <a:graphicData uri="http://schemas.openxmlformats.org/drawingml/2006/table">
+            <a:tbl>
+              <a:tblPr firstRow="1" bandRow="1">
+                <a:tableStyleId>{5C22544A-7EE6-4342-B048-85BDC9FD1C3A}</a:tableStyleId>
+              </a:tblPr>
+              <a:tblGrid>
+                <a:gridCol w="3931920"/>
+                <a:gridCol w="3931920"/>
+              </a:tblGrid>
+              <a:tr h="365760">
+                <a:tc>
+                  <a:txBody>
+                    <a:bodyPr/>
+                    <a:lstStyle/>
+                    <a:p>
+                      <a:pPr>
+                        <a:defRPr sz="1600"/>
+                      </a:pPr>
+                      <a:r>
+                        <a:t>Metric</a:t>
+                      </a:r>
+                    </a:p>
+                  </a:txBody>
+                  <a:tcPr/>
+                </a:tc>
+                <a:tc>
+                  <a:txBody>
+                    <a:bodyPr/>
+                    <a:lstStyle/>
+                    <a:p>
+                      <a:pPr>
+                        <a:defRPr sz="1600"/>
+                      </a:pPr>
+                      <a:r>
+                        <a:t>Value</a:t>
+                      </a:r>
+                    </a:p>
+                  </a:txBody>
+                  <a:tcPr/>
+                </a:tc>
+              </a:tr>
+              <a:tr h="365760">
+                <a:tc>
+                  <a:txBody>
+                    <a:bodyPr/>
+                    <a:lstStyle/>
+                    <a:p>
+                      <a:pPr>
+                        <a:defRPr sz="1400"/>
+                      </a:pPr>
+                      <a:r>
+                        <a:t>Test accuracy</a:t>
+                      </a:r>
+                    </a:p>
+                  </a:txBody>
+                  <a:tcPr/>
+                </a:tc>
+                <a:tc>
+                  <a:txBody>
+                    <a:bodyPr/>
+                    <a:lstStyle/>
+                    <a:p>
+                      <a:pPr>
+                        <a:defRPr sz="1400"/>
+                      </a:pPr>
+                      <a:r>
+                        <a:t>0.911</a:t>
+                      </a:r>
+                    </a:p>
+                  </a:txBody>
+                  <a:tcPr/>
+                </a:tc>
+              </a:tr>
+              <a:tr h="365760">
+                <a:tc>
+                  <a:txBody>
+                    <a:bodyPr/>
+                    <a:lstStyle/>
+                    <a:p>
+                      <a:pPr>
+                        <a:defRPr sz="1400"/>
+                      </a:pPr>
+                      <a:r>
+                        <a:t>5-fold CV</a:t>
+                      </a:r>
+                    </a:p>
+                  </a:txBody>
+                  <a:tcPr/>
+                </a:tc>
+                <a:tc>
+                  <a:txBody>
+                    <a:bodyPr/>
+                    <a:lstStyle/>
+                    <a:p>
+                      <a:pPr>
+                        <a:defRPr sz="1400"/>
+                      </a:pPr>
+                      <a:r>
+                        <a:t>0.960 (+/- 0.039)</a:t>
+                      </a:r>
+                    </a:p>
+                  </a:txBody>
+                  <a:tcPr/>
+                </a:tc>
+              </a:tr>
+              <a:tr h="365760">
+                <a:tc>
+                  <a:txBody>
+                    <a:bodyPr/>
+                    <a:lstStyle/>
+                    <a:p>
+                      <a:pPr>
+                        <a:defRPr sz="1400"/>
+                      </a:pPr>
+                      <a:r>
+                        <a:t>Baseline</a:t>
+                      </a:r>
+                    </a:p>
+                  </a:txBody>
+                  <a:tcPr/>
+                </a:tc>
+                <a:tc>
+                  <a:txBody>
+                    <a:bodyPr/>
+                    <a:lstStyle/>
+                    <a:p>
+                      <a:pPr>
+                        <a:defRPr sz="1400"/>
+                      </a:pPr>
+                      <a:r>
+                        <a:t>0.333</a:t>
+                      </a:r>
+                    </a:p>
+                  </a:txBody>
+                  <a:tcPr/>
+                </a:tc>
+              </a:tr>
+            </a:tbl>
+          </a:graphicData>
+        </a:graphic>
+      </p:graphicFrame>
     </p:spTree>
   </p:cSld>
   <p:clrMapOvr>
@@ -3311,46 +3433,30 @@
           </a:p>
         </p:txBody>
       </p:sp>
-      <p:sp>
-        <p:nvSpPr>
-          <p:cNvPr id="3" name="Content Placeholder 2"/>
-          <p:cNvSpPr>
-            <a:spLocks noGrp="1"/>
-          </p:cNvSpPr>
-          <p:nvPr>
-            <p:ph idx="1"/>
-          </p:nvPr>
-        </p:nvSpPr>
-        <p:spPr/>
-        <p:txBody>
-          <a:bodyPr/>
-          <a:lstStyle/>
-          <a:p>
-            <a:pPr>
-              <a:defRPr sz="1800"/>
-            </a:pPr>
-            <a:r>
-              <a:t>Test accuracy 0.911</a:t>
-            </a:r>
-          </a:p>
-          <a:p>
-            <a:pPr>
-              <a:defRPr sz="1800"/>
-            </a:pPr>
-            <a:r>
-              <a:t>5-fold CV 0.960 +/- 0.039</a:t>
-            </a:r>
-          </a:p>
-          <a:p>
-            <a:pPr>
-              <a:defRPr sz="1800"/>
-            </a:pPr>
-            <a:r>
-              <a:t>Beats dummy baseline (0.333)</a:t>
-            </a:r>
-          </a:p>
-        </p:txBody>
-      </p:sp>
+      <p:pic>
+        <p:nvPicPr>
+          <p:cNvPr id="3" name="Picture 2" descr="confusion_matrix.png"/>
+          <p:cNvPicPr>
+            <a:picLocks noChangeAspect="1"/>
+          </p:cNvPicPr>
+          <p:nvPr/>
+        </p:nvPicPr>
+        <p:blipFill>
+          <a:blip r:embed="rId2"/>
+          <a:stretch>
+            <a:fillRect/>
+          </a:stretch>
+        </p:blipFill>
+        <p:spPr>
+          <a:xfrm>
+            <a:off x="1598122" y="1554480"/>
+            <a:ext cx="5947756" cy="4846320"/>
+          </a:xfrm>
+          <a:prstGeom prst="rect">
+            <a:avLst/>
+          </a:prstGeom>
+        </p:spPr>
+      </p:pic>
     </p:spTree>
   </p:cSld>
   <p:clrMapOvr>
